--- a/docs/ppt-book/projets/Projet6-Quiz-interactif.pptx
+++ b/docs/ppt-book/projets/Projet6-Quiz-interactif.pptx
@@ -115,13 +115,13 @@
   <p:extLst>
     <p:ext uri="{521415D9-36F7-43E2-AB2F-B90AF26B5E84}">
       <p14:sectionLst xmlns:p14="http://schemas.microsoft.com/office/powerpoint/2010/main">
-        <p14:section name="البداية" id="{d58e544b-e5b7-b2ba-9faf-5b14b83c3a75}">
+        <p14:section name="البداية" id="{fd7e9991-40ad-ea27-7463-bbd126dfce10}">
           <p14:sldIdLst>
             <p14:sldId id="256"/>
             <p14:sldId id="257"/>
           </p14:sldIdLst>
         </p14:section>
-        <p14:section name="الأسئلة" id="{a6c8a049-b1dc-eb68-a609-f32cbb51ab30}">
+        <p14:section name="الأسئلة" id="{f938f422-df00-6399-4fb5-91eaede60f70}">
           <p14:sldIdLst>
             <p14:sldId id="258"/>
             <p14:sldId id="259"/>
